--- a/public/fun/cards/public/public-44.pptx
+++ b/public/fun/cards/public/public-44.pptx
@@ -3085,7 +3085,7 @@
     <p:bg>
       <p:bgPr>
         <a:solidFill>
-          <a:srgbClr val="F8F5F1"/>
+          <a:srgbClr val="FFFFFF"/>
         </a:solidFill>
         <a:effectLst/>
       </p:bgPr>
@@ -3099,38 +3099,20 @@
       <p:grpSpPr/>
       <p:sp>
         <p:nvSpPr>
-          <p:cNvPr id="2" name="Freeform 1"/>
+          <p:cNvPr id="2" name="Rectangle 1"/>
           <p:cNvSpPr/>
           <p:nvPr/>
         </p:nvSpPr>
         <p:spPr>
           <a:xfrm>
-            <a:off x="1944000" y="540000"/>
-            <a:ext cx="1296000" cy="1260000"/>
+            <a:off x="252000" y="144000"/>
+            <a:ext cx="201600" cy="21600"/>
           </a:xfrm>
-          <a:custGeom>
+          <a:prstGeom prst="rect">
             <a:avLst/>
-            <a:gdLst/>
-            <a:ahLst/>
-            <a:cxnLst/>
-            <a:rect l="l" t="t" r="r" b="b"/>
-            <a:pathLst>
-              <a:path w="1296000" h="1260000">
-                <a:moveTo>
-                  <a:pt x="1296000" y="1260000"/>
-                </a:moveTo>
-                <a:lnTo>
-                  <a:pt x="1296000" y="0"/>
-                </a:lnTo>
-                <a:lnTo>
-                  <a:pt x="0" y="1260000"/>
-                </a:lnTo>
-                <a:close/>
-              </a:path>
-            </a:pathLst>
-          </a:custGeom>
+          </a:prstGeom>
           <a:solidFill>
-            <a:srgbClr val="9D7D4D"/>
+            <a:srgbClr val="5B5BFF"/>
           </a:solidFill>
           <a:ln>
             <a:noFill/>
@@ -3146,130 +3128,124 @@
       </p:sp>
       <p:sp>
         <p:nvSpPr>
-          <p:cNvPr id="3" name="Freeform 2"/>
-          <p:cNvSpPr/>
+          <p:cNvPr id="3" name="텍스트"/>
+          <p:cNvSpPr txBox="1"/>
           <p:nvPr/>
         </p:nvSpPr>
         <p:spPr>
           <a:xfrm>
-            <a:off x="2520000" y="1080000"/>
-            <a:ext cx="720000" cy="720000"/>
+            <a:off x="252000" y="273600"/>
+            <a:ext cx="2160000" cy="360000"/>
           </a:xfrm>
-          <a:custGeom>
+          <a:prstGeom prst="rect">
             <a:avLst/>
-            <a:gdLst/>
-            <a:ahLst/>
-            <a:cxnLst/>
-            <a:rect l="l" t="t" r="r" b="b"/>
-            <a:pathLst>
-              <a:path w="720000" h="720000">
-                <a:moveTo>
-                  <a:pt x="720000" y="720000"/>
-                </a:moveTo>
-                <a:lnTo>
-                  <a:pt x="720000" y="0"/>
-                </a:lnTo>
-                <a:lnTo>
-                  <a:pt x="0" y="720000"/>
-                </a:lnTo>
-                <a:close/>
-              </a:path>
-            </a:pathLst>
-          </a:custGeom>
-          <a:solidFill>
-            <a:srgbClr val="F2EBE1">
-              <a:alpha val="90000"/>
-            </a:srgbClr>
-          </a:solidFill>
-          <a:ln>
-            <a:noFill/>
-          </a:ln>
+          </a:prstGeom>
+          <a:noFill/>
         </p:spPr>
         <p:txBody>
-          <a:bodyPr rtlCol="0" anchor="ctr"/>
-          <a:lstStyle/>
-          <a:p>
-            <a:pPr algn="ctr"/>
-          </a:p>
-        </p:txBody>
-      </p:sp>
-      <p:sp>
-        <p:nvSpPr>
-          <p:cNvPr id="4" name="Freeform 3"/>
-          <p:cNvSpPr/>
+          <a:bodyPr wrap="square" lIns="0" rIns="0" tIns="0" bIns="0" anchor="t">
+            <a:spAutoFit/>
+          </a:bodyPr>
+          <a:lstStyle/>
+          <a:p>
+            <a:pPr algn="l">
+              <a:lnSpc>
+                <a:spcPts val="3190"/>
+              </a:lnSpc>
+            </a:pPr>
+            <a:r>
+              <a:rPr sz="2200" b="1">
+                <a:solidFill>
+                  <a:srgbClr val="12151C"/>
+                </a:solidFill>
+                <a:latin typeface="맑은 고딕"/>
+                <a:ea typeface="맑은 고딕"/>
+              </a:rPr>
+              <a:t>연주혁</a:t>
+            </a:r>
+          </a:p>
+        </p:txBody>
+      </p:sp>
+      <p:sp>
+        <p:nvSpPr>
+          <p:cNvPr id="4" name="텍스트"/>
+          <p:cNvSpPr txBox="1"/>
           <p:nvPr/>
         </p:nvSpPr>
         <p:spPr>
           <a:xfrm>
-            <a:off x="2861424" y="1353456"/>
-            <a:ext cx="181152" cy="239760"/>
+            <a:off x="252000" y="676800"/>
+            <a:ext cx="2160000" cy="171451"/>
           </a:xfrm>
-          <a:custGeom>
+          <a:prstGeom prst="rect">
             <a:avLst/>
-            <a:gdLst/>
-            <a:ahLst/>
-            <a:cxnLst/>
-            <a:rect l="l" t="t" r="r" b="b"/>
-            <a:pathLst>
-              <a:path w="181152" h="239760">
-                <a:moveTo>
-                  <a:pt x="0" y="26640"/>
-                </a:moveTo>
-                <a:lnTo>
-                  <a:pt x="90576" y="0"/>
-                </a:lnTo>
-                <a:lnTo>
-                  <a:pt x="181152" y="26640"/>
-                </a:lnTo>
-                <a:lnTo>
-                  <a:pt x="181152" y="127872"/>
-                </a:lnTo>
-                <a:lnTo>
-                  <a:pt x="90576" y="239760"/>
-                </a:lnTo>
-                <a:lnTo>
-                  <a:pt x="0" y="127872"/>
-                </a:lnTo>
-                <a:close/>
-              </a:path>
-            </a:pathLst>
-          </a:custGeom>
-          <a:solidFill>
-            <a:srgbClr val="FFFFFF"/>
-          </a:solidFill>
-          <a:ln>
-            <a:noFill/>
-          </a:ln>
+          </a:prstGeom>
+          <a:noFill/>
         </p:spPr>
         <p:txBody>
-          <a:bodyPr rtlCol="0" anchor="ctr"/>
-          <a:lstStyle/>
-          <a:p>
-            <a:pPr algn="ctr"/>
-          </a:p>
-        </p:txBody>
-      </p:sp>
-      <p:cxnSp>
-        <p:nvCxnSpPr>
-          <p:cNvPr id="5" name="Connector 4"/>
-          <p:cNvCxnSpPr/>
+          <a:bodyPr wrap="square" lIns="0" rIns="0" tIns="0" bIns="0" anchor="t">
+            <a:spAutoFit/>
+          </a:bodyPr>
+          <a:lstStyle/>
+          <a:p>
+            <a:pPr algn="l">
+              <a:lnSpc>
+                <a:spcPts val="1305"/>
+              </a:lnSpc>
+            </a:pPr>
+            <a:r>
+              <a:rPr sz="900" b="0">
+                <a:solidFill>
+                  <a:srgbClr val="6B7280"/>
+                </a:solidFill>
+                <a:latin typeface="맑은 고딕"/>
+                <a:ea typeface="맑은 고딕"/>
+              </a:rPr>
+              <a:t>과장</a:t>
+            </a:r>
+          </a:p>
+        </p:txBody>
+      </p:sp>
+      <p:sp>
+        <p:nvSpPr>
+          <p:cNvPr id="5" name="텍스트"/>
+          <p:cNvSpPr txBox="1"/>
           <p:nvPr/>
-        </p:nvCxnSpPr>
+        </p:nvSpPr>
         <p:spPr>
           <a:xfrm>
-            <a:off x="2914704" y="1476000"/>
-            <a:ext cx="29304" cy="31968"/>
+            <a:off x="1548000" y="230400"/>
+            <a:ext cx="1440000" cy="123826"/>
           </a:xfrm>
-          <a:prstGeom prst="line">
+          <a:prstGeom prst="rect">
             <a:avLst/>
           </a:prstGeom>
-          <a:ln w="18648">
-            <a:solidFill>
-              <a:srgbClr val="808080"/>
-            </a:solidFill>
-          </a:ln>
+          <a:noFill/>
         </p:spPr>
-      </p:cxnSp>
+        <p:txBody>
+          <a:bodyPr wrap="square" lIns="0" rIns="0" tIns="0" bIns="0" anchor="t">
+            <a:spAutoFit/>
+          </a:bodyPr>
+          <a:lstStyle/>
+          <a:p>
+            <a:pPr algn="r">
+              <a:lnSpc>
+                <a:spcPts val="942"/>
+              </a:lnSpc>
+            </a:pPr>
+            <a:r>
+              <a:rPr sz="650" b="1" spc="200">
+                <a:solidFill>
+                  <a:srgbClr val="6B7280"/>
+                </a:solidFill>
+                <a:latin typeface="맑은 고딕"/>
+                <a:ea typeface="맑은 고딕"/>
+              </a:rPr>
+              <a:t>기관명 · 부서명</a:t>
+            </a:r>
+          </a:p>
+        </p:txBody>
+      </p:sp>
       <p:cxnSp>
         <p:nvCxnSpPr>
           <p:cNvPr id="6" name="Connector 5"/>
@@ -3277,16 +3253,16 @@
           <p:nvPr/>
         </p:nvCxnSpPr>
         <p:spPr>
-          <a:xfrm flipV="1">
-            <a:off x="2944008" y="1444032"/>
-            <a:ext cx="50616" cy="63936"/>
+          <a:xfrm>
+            <a:off x="252000" y="1051200"/>
+            <a:ext cx="2736000" cy="0"/>
           </a:xfrm>
           <a:prstGeom prst="line">
             <a:avLst/>
           </a:prstGeom>
-          <a:ln w="18648">
+          <a:ln w="5760">
             <a:solidFill>
-              <a:srgbClr val="808080"/>
+              <a:srgbClr val="E3E5E9"/>
             </a:solidFill>
           </a:ln>
         </p:spPr>
@@ -3299,8 +3275,8 @@
         </p:nvSpPr>
         <p:spPr>
           <a:xfrm>
-            <a:off x="252000" y="201600"/>
-            <a:ext cx="1800000" cy="100800"/>
+            <a:off x="252000" y="1123200"/>
+            <a:ext cx="576000" cy="99061"/>
           </a:xfrm>
           <a:prstGeom prst="rect">
             <a:avLst/>
@@ -3315,18 +3291,18 @@
           <a:p>
             <a:pPr algn="l">
               <a:lnSpc>
-                <a:spcPts val="1087"/>
+                <a:spcPts val="754"/>
               </a:lnSpc>
             </a:pPr>
             <a:r>
-              <a:rPr sz="750" b="1" spc="150">
+              <a:rPr sz="520" b="1" spc="150">
                 <a:solidFill>
-                  <a:srgbClr val="746A5A"/>
+                  <a:srgbClr val="6B7280"/>
                 </a:solidFill>
                 <a:latin typeface="맑은 고딕"/>
                 <a:ea typeface="맑은 고딕"/>
               </a:rPr>
-              <a:t>기관명 · 부서명</a:t>
+              <a:t>TEL</a:t>
             </a:r>
           </a:p>
         </p:txBody>
@@ -3339,8 +3315,8 @@
         </p:nvSpPr>
         <p:spPr>
           <a:xfrm>
-            <a:off x="252000" y="360000"/>
-            <a:ext cx="2016000" cy="313692"/>
+            <a:off x="900000" y="1101600"/>
+            <a:ext cx="2088000" cy="142876"/>
           </a:xfrm>
           <a:prstGeom prst="rect">
             <a:avLst/>
@@ -3355,32 +3331,53 @@
           <a:p>
             <a:pPr algn="l">
               <a:lnSpc>
-                <a:spcPts val="2755"/>
+                <a:spcPts val="1087"/>
               </a:lnSpc>
             </a:pPr>
             <a:r>
-              <a:rPr sz="1900" b="1" spc="50">
+              <a:rPr sz="750" b="0">
                 <a:solidFill>
-                  <a:srgbClr val="59472C"/>
+                  <a:srgbClr val="12151C"/>
                 </a:solidFill>
                 <a:latin typeface="맑은 고딕"/>
                 <a:ea typeface="맑은 고딕"/>
               </a:rPr>
-              <a:t>연주혁</a:t>
-            </a:r>
-          </a:p>
-        </p:txBody>
-      </p:sp>
-      <p:sp>
-        <p:nvSpPr>
-          <p:cNvPr id="9" name="텍스트"/>
+              <a:t>010-1234-5678</a:t>
+            </a:r>
+          </a:p>
+        </p:txBody>
+      </p:sp>
+      <p:cxnSp>
+        <p:nvCxnSpPr>
+          <p:cNvPr id="9" name="Connector 8"/>
+          <p:cNvCxnSpPr/>
+          <p:nvPr/>
+        </p:nvCxnSpPr>
+        <p:spPr>
+          <a:xfrm>
+            <a:off x="252000" y="1274400"/>
+            <a:ext cx="2736000" cy="0"/>
+          </a:xfrm>
+          <a:prstGeom prst="line">
+            <a:avLst/>
+          </a:prstGeom>
+          <a:ln w="5760">
+            <a:solidFill>
+              <a:srgbClr val="E3E5E9"/>
+            </a:solidFill>
+          </a:ln>
+        </p:spPr>
+      </p:cxnSp>
+      <p:sp>
+        <p:nvSpPr>
+          <p:cNvPr id="10" name="텍스트"/>
           <p:cNvSpPr txBox="1"/>
           <p:nvPr/>
         </p:nvSpPr>
         <p:spPr>
           <a:xfrm>
-            <a:off x="252000" y="655200"/>
-            <a:ext cx="1872000" cy="122400"/>
+            <a:off x="252000" y="1346400"/>
+            <a:ext cx="576000" cy="99061"/>
           </a:xfrm>
           <a:prstGeom prst="rect">
             <a:avLst/>
@@ -3395,48 +3392,19 @@
           <a:p>
             <a:pPr algn="l">
               <a:lnSpc>
-                <a:spcPts val="1232"/>
+                <a:spcPts val="754"/>
               </a:lnSpc>
             </a:pPr>
             <a:r>
-              <a:rPr sz="850" b="1">
+              <a:rPr sz="520" b="1" spc="150">
                 <a:solidFill>
-                  <a:srgbClr val="856A41"/>
+                  <a:srgbClr val="6B7280"/>
                 </a:solidFill>
                 <a:latin typeface="맑은 고딕"/>
                 <a:ea typeface="맑은 고딕"/>
               </a:rPr>
-              <a:t>과장</a:t>
-            </a:r>
-          </a:p>
-        </p:txBody>
-      </p:sp>
-      <p:sp>
-        <p:nvSpPr>
-          <p:cNvPr id="10" name="Rectangle 9"/>
-          <p:cNvSpPr/>
-          <p:nvPr/>
-        </p:nvSpPr>
-        <p:spPr>
-          <a:xfrm>
-            <a:off x="252000" y="864000"/>
-            <a:ext cx="230400" cy="14400"/>
-          </a:xfrm>
-          <a:prstGeom prst="rect">
-            <a:avLst/>
-          </a:prstGeom>
-          <a:solidFill>
-            <a:srgbClr val="9D7D4D"/>
-          </a:solidFill>
-          <a:ln>
-            <a:noFill/>
-          </a:ln>
-        </p:spPr>
-        <p:txBody>
-          <a:bodyPr rtlCol="0" anchor="ctr"/>
-          <a:lstStyle/>
-          <a:p>
-            <a:pPr algn="ctr"/>
+              <a:t>MAIL</a:t>
+            </a:r>
           </a:p>
         </p:txBody>
       </p:sp>
@@ -3448,8 +3416,8 @@
         </p:nvSpPr>
         <p:spPr>
           <a:xfrm>
-            <a:off x="252000" y="1044000"/>
-            <a:ext cx="122400" cy="168911"/>
+            <a:off x="900000" y="1324800"/>
+            <a:ext cx="2088000" cy="142876"/>
           </a:xfrm>
           <a:prstGeom prst="rect">
             <a:avLst/>
@@ -3464,32 +3432,53 @@
           <a:p>
             <a:pPr algn="l">
               <a:lnSpc>
-                <a:spcPts val="1015"/>
+                <a:spcPts val="1087"/>
               </a:lnSpc>
             </a:pPr>
             <a:r>
-              <a:rPr sz="700" b="1">
+              <a:rPr sz="750" b="0">
                 <a:solidFill>
-                  <a:srgbClr val="856A41"/>
+                  <a:srgbClr val="12151C"/>
                 </a:solidFill>
                 <a:latin typeface="맑은 고딕"/>
                 <a:ea typeface="맑은 고딕"/>
               </a:rPr>
-              <a:t>T</a:t>
-            </a:r>
-          </a:p>
-        </p:txBody>
-      </p:sp>
-      <p:sp>
-        <p:nvSpPr>
-          <p:cNvPr id="12" name="텍스트"/>
+              <a:t>name@example.com</a:t>
+            </a:r>
+          </a:p>
+        </p:txBody>
+      </p:sp>
+      <p:cxnSp>
+        <p:nvCxnSpPr>
+          <p:cNvPr id="12" name="Connector 11"/>
+          <p:cNvCxnSpPr/>
+          <p:nvPr/>
+        </p:nvCxnSpPr>
+        <p:spPr>
+          <a:xfrm>
+            <a:off x="252000" y="1497600"/>
+            <a:ext cx="2736000" cy="0"/>
+          </a:xfrm>
+          <a:prstGeom prst="line">
+            <a:avLst/>
+          </a:prstGeom>
+          <a:ln w="5760">
+            <a:solidFill>
+              <a:srgbClr val="E3E5E9"/>
+            </a:solidFill>
+          </a:ln>
+        </p:spPr>
+      </p:cxnSp>
+      <p:sp>
+        <p:nvSpPr>
+          <p:cNvPr id="13" name="텍스트"/>
           <p:cNvSpPr txBox="1"/>
           <p:nvPr/>
         </p:nvSpPr>
         <p:spPr>
           <a:xfrm>
-            <a:off x="396000" y="1044000"/>
-            <a:ext cx="1584000" cy="168911"/>
+            <a:off x="252000" y="1569600"/>
+            <a:ext cx="576000" cy="99061"/>
           </a:xfrm>
           <a:prstGeom prst="rect">
             <a:avLst/>
@@ -3504,32 +3493,32 @@
           <a:p>
             <a:pPr algn="l">
               <a:lnSpc>
-                <a:spcPts val="1015"/>
+                <a:spcPts val="754"/>
               </a:lnSpc>
             </a:pPr>
             <a:r>
-              <a:rPr sz="700" b="0">
+              <a:rPr sz="520" b="1" spc="150">
                 <a:solidFill>
-                  <a:srgbClr val="59472C"/>
+                  <a:srgbClr val="6B7280"/>
                 </a:solidFill>
                 <a:latin typeface="맑은 고딕"/>
                 <a:ea typeface="맑은 고딕"/>
               </a:rPr>
-              <a:t>010-1234-5678</a:t>
-            </a:r>
-          </a:p>
-        </p:txBody>
-      </p:sp>
-      <p:sp>
-        <p:nvSpPr>
-          <p:cNvPr id="13" name="텍스트"/>
+              <a:t>ADDR</a:t>
+            </a:r>
+          </a:p>
+        </p:txBody>
+      </p:sp>
+      <p:sp>
+        <p:nvSpPr>
+          <p:cNvPr id="14" name="텍스트"/>
           <p:cNvSpPr txBox="1"/>
           <p:nvPr/>
         </p:nvSpPr>
         <p:spPr>
           <a:xfrm>
-            <a:off x="252000" y="1212911"/>
-            <a:ext cx="122400" cy="168911"/>
+            <a:off x="900000" y="1548000"/>
+            <a:ext cx="2088000" cy="142876"/>
           </a:xfrm>
           <a:prstGeom prst="rect">
             <a:avLst/>
@@ -3544,133 +3533,13 @@
           <a:p>
             <a:pPr algn="l">
               <a:lnSpc>
-                <a:spcPts val="1015"/>
+                <a:spcPts val="1087"/>
               </a:lnSpc>
             </a:pPr>
             <a:r>
-              <a:rPr sz="700" b="1">
+              <a:rPr sz="750" b="0">
                 <a:solidFill>
-                  <a:srgbClr val="856A41"/>
-                </a:solidFill>
-                <a:latin typeface="맑은 고딕"/>
-                <a:ea typeface="맑은 고딕"/>
-              </a:rPr>
-              <a:t>E</a:t>
-            </a:r>
-          </a:p>
-        </p:txBody>
-      </p:sp>
-      <p:sp>
-        <p:nvSpPr>
-          <p:cNvPr id="14" name="텍스트"/>
-          <p:cNvSpPr txBox="1"/>
-          <p:nvPr/>
-        </p:nvSpPr>
-        <p:spPr>
-          <a:xfrm>
-            <a:off x="396000" y="1212911"/>
-            <a:ext cx="1584000" cy="168911"/>
-          </a:xfrm>
-          <a:prstGeom prst="rect">
-            <a:avLst/>
-          </a:prstGeom>
-          <a:noFill/>
-        </p:spPr>
-        <p:txBody>
-          <a:bodyPr wrap="square" lIns="0" rIns="0" tIns="0" bIns="0" anchor="t">
-            <a:spAutoFit/>
-          </a:bodyPr>
-          <a:lstStyle/>
-          <a:p>
-            <a:pPr algn="l">
-              <a:lnSpc>
-                <a:spcPts val="1015"/>
-              </a:lnSpc>
-            </a:pPr>
-            <a:r>
-              <a:rPr sz="700" b="0">
-                <a:solidFill>
-                  <a:srgbClr val="59472C"/>
-                </a:solidFill>
-                <a:latin typeface="맑은 고딕"/>
-                <a:ea typeface="맑은 고딕"/>
-              </a:rPr>
-              <a:t>name@example.com</a:t>
-            </a:r>
-          </a:p>
-        </p:txBody>
-      </p:sp>
-      <p:sp>
-        <p:nvSpPr>
-          <p:cNvPr id="15" name="텍스트"/>
-          <p:cNvSpPr txBox="1"/>
-          <p:nvPr/>
-        </p:nvSpPr>
-        <p:spPr>
-          <a:xfrm>
-            <a:off x="252000" y="1381822"/>
-            <a:ext cx="122400" cy="168911"/>
-          </a:xfrm>
-          <a:prstGeom prst="rect">
-            <a:avLst/>
-          </a:prstGeom>
-          <a:noFill/>
-        </p:spPr>
-        <p:txBody>
-          <a:bodyPr wrap="square" lIns="0" rIns="0" tIns="0" bIns="0" anchor="t">
-            <a:spAutoFit/>
-          </a:bodyPr>
-          <a:lstStyle/>
-          <a:p>
-            <a:pPr algn="l">
-              <a:lnSpc>
-                <a:spcPts val="1015"/>
-              </a:lnSpc>
-            </a:pPr>
-            <a:r>
-              <a:rPr sz="700" b="1">
-                <a:solidFill>
-                  <a:srgbClr val="856A41"/>
-                </a:solidFill>
-                <a:latin typeface="맑은 고딕"/>
-                <a:ea typeface="맑은 고딕"/>
-              </a:rPr>
-              <a:t>A</a:t>
-            </a:r>
-          </a:p>
-        </p:txBody>
-      </p:sp>
-      <p:sp>
-        <p:nvSpPr>
-          <p:cNvPr id="16" name="텍스트"/>
-          <p:cNvSpPr txBox="1"/>
-          <p:nvPr/>
-        </p:nvSpPr>
-        <p:spPr>
-          <a:xfrm>
-            <a:off x="396000" y="1381822"/>
-            <a:ext cx="1584000" cy="168911"/>
-          </a:xfrm>
-          <a:prstGeom prst="rect">
-            <a:avLst/>
-          </a:prstGeom>
-          <a:noFill/>
-        </p:spPr>
-        <p:txBody>
-          <a:bodyPr wrap="square" lIns="0" rIns="0" tIns="0" bIns="0" anchor="t">
-            <a:spAutoFit/>
-          </a:bodyPr>
-          <a:lstStyle/>
-          <a:p>
-            <a:pPr algn="l">
-              <a:lnSpc>
-                <a:spcPts val="1015"/>
-              </a:lnSpc>
-            </a:pPr>
-            <a:r>
-              <a:rPr sz="700" b="0">
-                <a:solidFill>
-                  <a:srgbClr val="59472C"/>
+                  <a:srgbClr val="12151C"/>
                 </a:solidFill>
                 <a:latin typeface="맑은 고딕"/>
                 <a:ea typeface="맑은 고딕"/>
@@ -3680,6 +3549,27 @@
           </a:p>
         </p:txBody>
       </p:sp>
+      <p:cxnSp>
+        <p:nvCxnSpPr>
+          <p:cNvPr id="15" name="Connector 14"/>
+          <p:cNvCxnSpPr/>
+          <p:nvPr/>
+        </p:nvCxnSpPr>
+        <p:spPr>
+          <a:xfrm>
+            <a:off x="252000" y="1720800"/>
+            <a:ext cx="2736000" cy="0"/>
+          </a:xfrm>
+          <a:prstGeom prst="line">
+            <a:avLst/>
+          </a:prstGeom>
+          <a:ln w="5760">
+            <a:solidFill>
+              <a:srgbClr val="E3E5E9"/>
+            </a:solidFill>
+          </a:ln>
+        </p:spPr>
+      </p:cxnSp>
     </p:spTree>
   </p:cSld>
   <p:clrMapOvr>
@@ -3694,7 +3584,7 @@
     <p:bg>
       <p:bgPr>
         <a:solidFill>
-          <a:srgbClr val="7E653E"/>
+          <a:srgbClr val="5B5BFF"/>
         </a:solidFill>
         <a:effectLst/>
       </p:bgPr>
@@ -3708,20 +3598,20 @@
       <p:grpSpPr/>
       <p:sp>
         <p:nvSpPr>
-          <p:cNvPr id="2" name="Rectangle 1"/>
+          <p:cNvPr id="2" name="Oval 1"/>
           <p:cNvSpPr/>
           <p:nvPr/>
         </p:nvSpPr>
         <p:spPr>
           <a:xfrm>
-            <a:off x="0" y="0"/>
-            <a:ext cx="3240000" cy="1800000"/>
+            <a:off x="1411200" y="295200"/>
+            <a:ext cx="417600" cy="417600"/>
           </a:xfrm>
-          <a:prstGeom prst="rect">
+          <a:prstGeom prst="ellipse">
             <a:avLst/>
           </a:prstGeom>
           <a:solidFill>
-            <a:srgbClr val="ECE3D4"/>
+            <a:srgbClr val="FFFFFF"/>
           </a:solidFill>
           <a:ln>
             <a:noFill/>
@@ -3737,112 +3627,14 @@
       </p:sp>
       <p:sp>
         <p:nvSpPr>
-          <p:cNvPr id="3" name="Freeform 2"/>
-          <p:cNvSpPr/>
+          <p:cNvPr id="3" name="텍스트"/>
+          <p:cNvSpPr txBox="1"/>
           <p:nvPr/>
         </p:nvSpPr>
         <p:spPr>
           <a:xfrm>
-            <a:off x="1497600" y="374400"/>
-            <a:ext cx="244800" cy="324000"/>
-          </a:xfrm>
-          <a:custGeom>
-            <a:avLst/>
-            <a:gdLst/>
-            <a:ahLst/>
-            <a:cxnLst/>
-            <a:rect l="l" t="t" r="r" b="b"/>
-            <a:pathLst>
-              <a:path w="244800" h="324000">
-                <a:moveTo>
-                  <a:pt x="0" y="36000"/>
-                </a:moveTo>
-                <a:lnTo>
-                  <a:pt x="122400" y="0"/>
-                </a:lnTo>
-                <a:lnTo>
-                  <a:pt x="244800" y="36000"/>
-                </a:lnTo>
-                <a:lnTo>
-                  <a:pt x="244800" y="172800"/>
-                </a:lnTo>
-                <a:lnTo>
-                  <a:pt x="122400" y="324000"/>
-                </a:lnTo>
-                <a:lnTo>
-                  <a:pt x="0" y="172800"/>
-                </a:lnTo>
-                <a:close/>
-              </a:path>
-            </a:pathLst>
-          </a:custGeom>
-          <a:solidFill>
-            <a:srgbClr val="666666"/>
-          </a:solidFill>
-          <a:ln>
-            <a:noFill/>
-          </a:ln>
-        </p:spPr>
-        <p:txBody>
-          <a:bodyPr rtlCol="0" anchor="ctr"/>
-          <a:lstStyle/>
-          <a:p>
-            <a:pPr algn="ctr"/>
-          </a:p>
-        </p:txBody>
-      </p:sp>
-      <p:cxnSp>
-        <p:nvCxnSpPr>
-          <p:cNvPr id="4" name="Connector 3"/>
-          <p:cNvCxnSpPr/>
-          <p:nvPr/>
-        </p:nvCxnSpPr>
-        <p:spPr>
-          <a:xfrm>
-            <a:off x="1569600" y="540000"/>
-            <a:ext cx="39600" cy="43200"/>
-          </a:xfrm>
-          <a:prstGeom prst="line">
-            <a:avLst/>
-          </a:prstGeom>
-          <a:ln w="25200">
-            <a:solidFill>
-              <a:srgbClr val="E8E8E8"/>
-            </a:solidFill>
-          </a:ln>
-        </p:spPr>
-      </p:cxnSp>
-      <p:cxnSp>
-        <p:nvCxnSpPr>
-          <p:cNvPr id="5" name="Connector 4"/>
-          <p:cNvCxnSpPr/>
-          <p:nvPr/>
-        </p:nvCxnSpPr>
-        <p:spPr>
-          <a:xfrm flipV="1">
-            <a:off x="1609200" y="496800"/>
-            <a:ext cx="68400" cy="86400"/>
-          </a:xfrm>
-          <a:prstGeom prst="line">
-            <a:avLst/>
-          </a:prstGeom>
-          <a:ln w="25200">
-            <a:solidFill>
-              <a:srgbClr val="E8E8E8"/>
-            </a:solidFill>
-          </a:ln>
-        </p:spPr>
-      </p:cxnSp>
-      <p:sp>
-        <p:nvSpPr>
-          <p:cNvPr id="6" name="텍스트"/>
-          <p:cNvSpPr txBox="1"/>
-          <p:nvPr/>
-        </p:nvSpPr>
-        <p:spPr>
-          <a:xfrm>
-            <a:off x="396000" y="835200"/>
-            <a:ext cx="2448000" cy="396000"/>
+            <a:off x="1368000" y="324000"/>
+            <a:ext cx="504000" cy="360000"/>
           </a:xfrm>
           <a:prstGeom prst="rect">
             <a:avLst/>
@@ -3857,32 +3649,32 @@
           <a:p>
             <a:pPr algn="ctr">
               <a:lnSpc>
-                <a:spcPts val="1667"/>
+                <a:spcPts val="3769"/>
               </a:lnSpc>
             </a:pPr>
             <a:r>
-              <a:rPr sz="1150" b="1">
+              <a:rPr sz="2600" b="1">
                 <a:solidFill>
-                  <a:srgbClr val="666666"/>
+                  <a:srgbClr val="12151C"/>
                 </a:solidFill>
                 <a:latin typeface="맑은 고딕"/>
                 <a:ea typeface="맑은 고딕"/>
               </a:rPr>
-              <a:t>변화하는 행정을 배웁니다</a:t>
-            </a:r>
-          </a:p>
-        </p:txBody>
-      </p:sp>
-      <p:sp>
-        <p:nvSpPr>
-          <p:cNvPr id="7" name="텍스트"/>
+              <a:t>기</a:t>
+            </a:r>
+          </a:p>
+        </p:txBody>
+      </p:sp>
+      <p:sp>
+        <p:nvSpPr>
+          <p:cNvPr id="4" name="텍스트"/>
           <p:cNvSpPr txBox="1"/>
           <p:nvPr/>
         </p:nvSpPr>
         <p:spPr>
           <a:xfrm>
-            <a:off x="360000" y="1476000"/>
-            <a:ext cx="2520000" cy="108000"/>
+            <a:off x="360000" y="820800"/>
+            <a:ext cx="2520000" cy="161926"/>
           </a:xfrm>
           <a:prstGeom prst="rect">
             <a:avLst/>
@@ -3897,18 +3689,87 @@
           <a:p>
             <a:pPr algn="ctr">
               <a:lnSpc>
-                <a:spcPts val="1015"/>
+                <a:spcPts val="1232"/>
               </a:lnSpc>
             </a:pPr>
             <a:r>
-              <a:rPr sz="700" b="1" spc="300">
+              <a:rPr sz="850" b="1" spc="200">
                 <a:solidFill>
-                  <a:srgbClr val="666666"/>
+                  <a:srgbClr val="FFFFFF"/>
                 </a:solidFill>
                 <a:latin typeface="맑은 고딕"/>
                 <a:ea typeface="맑은 고딕"/>
               </a:rPr>
               <a:t>기관명 · 부서명</a:t>
+            </a:r>
+          </a:p>
+        </p:txBody>
+      </p:sp>
+      <p:sp>
+        <p:nvSpPr>
+          <p:cNvPr id="5" name="Rectangle 4"/>
+          <p:cNvSpPr/>
+          <p:nvPr/>
+        </p:nvSpPr>
+        <p:spPr>
+          <a:xfrm>
+            <a:off x="1530000" y="1051200"/>
+            <a:ext cx="180000" cy="14400"/>
+          </a:xfrm>
+          <a:prstGeom prst="rect">
+            <a:avLst/>
+          </a:prstGeom>
+          <a:solidFill>
+            <a:srgbClr val="FFFFFF"/>
+          </a:solidFill>
+          <a:ln>
+            <a:noFill/>
+          </a:ln>
+        </p:spPr>
+        <p:txBody>
+          <a:bodyPr rtlCol="0" anchor="ctr"/>
+          <a:lstStyle/>
+          <a:p>
+            <a:pPr algn="ctr"/>
+          </a:p>
+        </p:txBody>
+      </p:sp>
+      <p:sp>
+        <p:nvSpPr>
+          <p:cNvPr id="6" name="텍스트"/>
+          <p:cNvSpPr txBox="1"/>
+          <p:nvPr/>
+        </p:nvSpPr>
+        <p:spPr>
+          <a:xfrm>
+            <a:off x="540000" y="1188000"/>
+            <a:ext cx="2160000" cy="360000"/>
+          </a:xfrm>
+          <a:prstGeom prst="rect">
+            <a:avLst/>
+          </a:prstGeom>
+          <a:noFill/>
+        </p:spPr>
+        <p:txBody>
+          <a:bodyPr wrap="square" lIns="0" rIns="0" tIns="0" bIns="0" anchor="t">
+            <a:spAutoFit/>
+          </a:bodyPr>
+          <a:lstStyle/>
+          <a:p>
+            <a:pPr algn="ctr">
+              <a:lnSpc>
+                <a:spcPts val="1305"/>
+              </a:lnSpc>
+            </a:pPr>
+            <a:r>
+              <a:rPr sz="900" b="1">
+                <a:solidFill>
+                  <a:srgbClr val="DBDBFF"/>
+                </a:solidFill>
+                <a:latin typeface="맑은 고딕"/>
+                <a:ea typeface="맑은 고딕"/>
+              </a:rPr>
+              <a:t>변화하는 행정을 배웁니다</a:t>
             </a:r>
           </a:p>
         </p:txBody>

--- a/public/fun/cards/public/public-44.pptx
+++ b/public/fun/cards/public/public-44.pptx
@@ -3105,8 +3105,8 @@
         </p:nvSpPr>
         <p:spPr>
           <a:xfrm>
-            <a:off x="252000" y="144000"/>
-            <a:ext cx="201600" cy="21600"/>
+            <a:off x="0" y="0"/>
+            <a:ext cx="3240000" cy="36000"/>
           </a:xfrm>
           <a:prstGeom prst="rect">
             <a:avLst/>
@@ -3134,8 +3134,8 @@
         </p:nvSpPr>
         <p:spPr>
           <a:xfrm>
-            <a:off x="252000" y="273600"/>
-            <a:ext cx="2160000" cy="360000"/>
+            <a:off x="252000" y="223200"/>
+            <a:ext cx="1296000" cy="237600"/>
           </a:xfrm>
           <a:prstGeom prst="rect">
             <a:avLst/>
@@ -3150,11 +3150,11 @@
           <a:p>
             <a:pPr algn="l">
               <a:lnSpc>
-                <a:spcPts val="3190"/>
+                <a:spcPts val="1957"/>
               </a:lnSpc>
             </a:pPr>
             <a:r>
-              <a:rPr sz="2200" b="1">
+              <a:rPr sz="1350" b="1" spc="120">
                 <a:solidFill>
                   <a:srgbClr val="12151C"/>
                 </a:solidFill>
@@ -3174,8 +3174,8 @@
         </p:nvSpPr>
         <p:spPr>
           <a:xfrm>
-            <a:off x="252000" y="676800"/>
-            <a:ext cx="2160000" cy="171451"/>
+            <a:off x="252000" y="475200"/>
+            <a:ext cx="1296000" cy="133351"/>
           </a:xfrm>
           <a:prstGeom prst="rect">
             <a:avLst/>
@@ -3190,11 +3190,11 @@
           <a:p>
             <a:pPr algn="l">
               <a:lnSpc>
-                <a:spcPts val="1305"/>
+                <a:spcPts val="1015"/>
               </a:lnSpc>
             </a:pPr>
             <a:r>
-              <a:rPr sz="900" b="0">
+              <a:rPr sz="700" b="0">
                 <a:solidFill>
                   <a:srgbClr val="6B7280"/>
                 </a:solidFill>
@@ -3214,7 +3214,7 @@
         </p:nvSpPr>
         <p:spPr>
           <a:xfrm>
-            <a:off x="1548000" y="230400"/>
+            <a:off x="1548000" y="259200"/>
             <a:ext cx="1440000" cy="123826"/>
           </a:xfrm>
           <a:prstGeom prst="rect">
@@ -3234,7 +3234,7 @@
               </a:lnSpc>
             </a:pPr>
             <a:r>
-              <a:rPr sz="650" b="1" spc="200">
+              <a:rPr sz="650" b="1" spc="220">
                 <a:solidFill>
                   <a:srgbClr val="6B7280"/>
                 </a:solidFill>
@@ -3254,13 +3254,13 @@
         </p:nvCxnSpPr>
         <p:spPr>
           <a:xfrm>
-            <a:off x="252000" y="1051200"/>
+            <a:off x="252000" y="907200"/>
             <a:ext cx="2736000" cy="0"/>
           </a:xfrm>
           <a:prstGeom prst="line">
             <a:avLst/>
           </a:prstGeom>
-          <a:ln w="5760">
+          <a:ln w="3600">
             <a:solidFill>
               <a:srgbClr val="E3E5E9"/>
             </a:solidFill>
@@ -3275,8 +3275,8 @@
         </p:nvSpPr>
         <p:spPr>
           <a:xfrm>
-            <a:off x="252000" y="1123200"/>
-            <a:ext cx="576000" cy="99061"/>
+            <a:off x="252000" y="986400"/>
+            <a:ext cx="576000" cy="91441"/>
           </a:xfrm>
           <a:prstGeom prst="rect">
             <a:avLst/>
@@ -3291,11 +3291,11 @@
           <a:p>
             <a:pPr algn="l">
               <a:lnSpc>
-                <a:spcPts val="754"/>
+                <a:spcPts val="696"/>
               </a:lnSpc>
             </a:pPr>
             <a:r>
-              <a:rPr sz="520" b="1" spc="150">
+              <a:rPr sz="480" b="1" spc="160">
                 <a:solidFill>
                   <a:srgbClr val="6B7280"/>
                 </a:solidFill>
@@ -3315,8 +3315,8 @@
         </p:nvSpPr>
         <p:spPr>
           <a:xfrm>
-            <a:off x="900000" y="1101600"/>
-            <a:ext cx="2088000" cy="142876"/>
+            <a:off x="936000" y="968400"/>
+            <a:ext cx="2052000" cy="133351"/>
           </a:xfrm>
           <a:prstGeom prst="rect">
             <a:avLst/>
@@ -3331,11 +3331,11 @@
           <a:p>
             <a:pPr algn="l">
               <a:lnSpc>
-                <a:spcPts val="1087"/>
+                <a:spcPts val="1015"/>
               </a:lnSpc>
             </a:pPr>
             <a:r>
-              <a:rPr sz="750" b="0">
+              <a:rPr sz="700" b="0">
                 <a:solidFill>
                   <a:srgbClr val="12151C"/>
                 </a:solidFill>
@@ -3355,13 +3355,13 @@
         </p:nvCxnSpPr>
         <p:spPr>
           <a:xfrm>
-            <a:off x="252000" y="1274400"/>
+            <a:off x="252000" y="1137600"/>
             <a:ext cx="2736000" cy="0"/>
           </a:xfrm>
           <a:prstGeom prst="line">
             <a:avLst/>
           </a:prstGeom>
-          <a:ln w="5760">
+          <a:ln w="3600">
             <a:solidFill>
               <a:srgbClr val="E3E5E9"/>
             </a:solidFill>
@@ -3376,8 +3376,8 @@
         </p:nvSpPr>
         <p:spPr>
           <a:xfrm>
-            <a:off x="252000" y="1346400"/>
-            <a:ext cx="576000" cy="99061"/>
+            <a:off x="252000" y="1216800"/>
+            <a:ext cx="576000" cy="91441"/>
           </a:xfrm>
           <a:prstGeom prst="rect">
             <a:avLst/>
@@ -3392,11 +3392,11 @@
           <a:p>
             <a:pPr algn="l">
               <a:lnSpc>
-                <a:spcPts val="754"/>
+                <a:spcPts val="696"/>
               </a:lnSpc>
             </a:pPr>
             <a:r>
-              <a:rPr sz="520" b="1" spc="150">
+              <a:rPr sz="480" b="1" spc="160">
                 <a:solidFill>
                   <a:srgbClr val="6B7280"/>
                 </a:solidFill>
@@ -3416,8 +3416,8 @@
         </p:nvSpPr>
         <p:spPr>
           <a:xfrm>
-            <a:off x="900000" y="1324800"/>
-            <a:ext cx="2088000" cy="142876"/>
+            <a:off x="936000" y="1198800"/>
+            <a:ext cx="2052000" cy="133351"/>
           </a:xfrm>
           <a:prstGeom prst="rect">
             <a:avLst/>
@@ -3432,11 +3432,11 @@
           <a:p>
             <a:pPr algn="l">
               <a:lnSpc>
-                <a:spcPts val="1087"/>
+                <a:spcPts val="1015"/>
               </a:lnSpc>
             </a:pPr>
             <a:r>
-              <a:rPr sz="750" b="0">
+              <a:rPr sz="700" b="0">
                 <a:solidFill>
                   <a:srgbClr val="12151C"/>
                 </a:solidFill>
@@ -3456,13 +3456,13 @@
         </p:nvCxnSpPr>
         <p:spPr>
           <a:xfrm>
-            <a:off x="252000" y="1497600"/>
+            <a:off x="252000" y="1368000"/>
             <a:ext cx="2736000" cy="0"/>
           </a:xfrm>
           <a:prstGeom prst="line">
             <a:avLst/>
           </a:prstGeom>
-          <a:ln w="5760">
+          <a:ln w="3600">
             <a:solidFill>
               <a:srgbClr val="E3E5E9"/>
             </a:solidFill>
@@ -3477,8 +3477,8 @@
         </p:nvSpPr>
         <p:spPr>
           <a:xfrm>
-            <a:off x="252000" y="1569600"/>
-            <a:ext cx="576000" cy="99061"/>
+            <a:off x="252000" y="1447200"/>
+            <a:ext cx="576000" cy="91441"/>
           </a:xfrm>
           <a:prstGeom prst="rect">
             <a:avLst/>
@@ -3493,11 +3493,11 @@
           <a:p>
             <a:pPr algn="l">
               <a:lnSpc>
-                <a:spcPts val="754"/>
+                <a:spcPts val="696"/>
               </a:lnSpc>
             </a:pPr>
             <a:r>
-              <a:rPr sz="520" b="1" spc="150">
+              <a:rPr sz="480" b="1" spc="160">
                 <a:solidFill>
                   <a:srgbClr val="6B7280"/>
                 </a:solidFill>
@@ -3517,8 +3517,8 @@
         </p:nvSpPr>
         <p:spPr>
           <a:xfrm>
-            <a:off x="900000" y="1548000"/>
-            <a:ext cx="2088000" cy="142876"/>
+            <a:off x="936000" y="1429200"/>
+            <a:ext cx="2052000" cy="133351"/>
           </a:xfrm>
           <a:prstGeom prst="rect">
             <a:avLst/>
@@ -3533,11 +3533,11 @@
           <a:p>
             <a:pPr algn="l">
               <a:lnSpc>
-                <a:spcPts val="1087"/>
+                <a:spcPts val="1015"/>
               </a:lnSpc>
             </a:pPr>
             <a:r>
-              <a:rPr sz="750" b="0">
+              <a:rPr sz="700" b="0">
                 <a:solidFill>
                   <a:srgbClr val="12151C"/>
                 </a:solidFill>
@@ -3557,13 +3557,13 @@
         </p:nvCxnSpPr>
         <p:spPr>
           <a:xfrm>
-            <a:off x="252000" y="1720800"/>
+            <a:off x="252000" y="1598400"/>
             <a:ext cx="2736000" cy="0"/>
           </a:xfrm>
           <a:prstGeom prst="line">
             <a:avLst/>
           </a:prstGeom>
-          <a:ln w="5760">
+          <a:ln w="3600">
             <a:solidFill>
               <a:srgbClr val="E3E5E9"/>
             </a:solidFill>
@@ -3598,43 +3598,14 @@
       <p:grpSpPr/>
       <p:sp>
         <p:nvSpPr>
-          <p:cNvPr id="2" name="Oval 1"/>
-          <p:cNvSpPr/>
-          <p:nvPr/>
-        </p:nvSpPr>
-        <p:spPr>
-          <a:xfrm>
-            <a:off x="1411200" y="295200"/>
-            <a:ext cx="417600" cy="417600"/>
-          </a:xfrm>
-          <a:prstGeom prst="ellipse">
-            <a:avLst/>
-          </a:prstGeom>
-          <a:solidFill>
-            <a:srgbClr val="FFFFFF"/>
-          </a:solidFill>
-          <a:ln>
-            <a:noFill/>
-          </a:ln>
-        </p:spPr>
-        <p:txBody>
-          <a:bodyPr rtlCol="0" anchor="ctr"/>
-          <a:lstStyle/>
-          <a:p>
-            <a:pPr algn="ctr"/>
-          </a:p>
-        </p:txBody>
-      </p:sp>
-      <p:sp>
-        <p:nvSpPr>
-          <p:cNvPr id="3" name="텍스트"/>
+          <p:cNvPr id="2" name="텍스트"/>
           <p:cNvSpPr txBox="1"/>
           <p:nvPr/>
         </p:nvSpPr>
         <p:spPr>
           <a:xfrm>
-            <a:off x="1368000" y="324000"/>
-            <a:ext cx="504000" cy="360000"/>
+            <a:off x="252000" y="252000"/>
+            <a:ext cx="1080000" cy="99061"/>
           </a:xfrm>
           <a:prstGeom prst="rect">
             <a:avLst/>
@@ -3642,79 +3613,39 @@
           <a:noFill/>
         </p:spPr>
         <p:txBody>
-          <a:bodyPr wrap="square" lIns="0" rIns="0" tIns="0" bIns="0" anchor="ctr">
+          <a:bodyPr wrap="square" lIns="0" rIns="0" tIns="0" bIns="0" anchor="t">
             <a:spAutoFit/>
           </a:bodyPr>
           <a:lstStyle/>
           <a:p>
-            <a:pPr algn="ctr">
+            <a:pPr algn="l">
               <a:lnSpc>
-                <a:spcPts val="3769"/>
+                <a:spcPts val="754"/>
               </a:lnSpc>
             </a:pPr>
             <a:r>
-              <a:rPr sz="2600" b="1">
+              <a:rPr sz="520" b="1" spc="240">
                 <a:solidFill>
-                  <a:srgbClr val="12151C"/>
+                  <a:srgbClr val="DBDBFF"/>
                 </a:solidFill>
                 <a:latin typeface="맑은 고딕"/>
                 <a:ea typeface="맑은 고딕"/>
               </a:rPr>
-              <a:t>기</a:t>
-            </a:r>
-          </a:p>
-        </p:txBody>
-      </p:sp>
-      <p:sp>
-        <p:nvSpPr>
-          <p:cNvPr id="4" name="텍스트"/>
-          <p:cNvSpPr txBox="1"/>
-          <p:nvPr/>
-        </p:nvSpPr>
-        <p:spPr>
-          <a:xfrm>
-            <a:off x="360000" y="820800"/>
-            <a:ext cx="2520000" cy="161926"/>
-          </a:xfrm>
-          <a:prstGeom prst="rect">
-            <a:avLst/>
-          </a:prstGeom>
-          <a:noFill/>
-        </p:spPr>
-        <p:txBody>
-          <a:bodyPr wrap="square" lIns="0" rIns="0" tIns="0" bIns="0" anchor="t">
-            <a:spAutoFit/>
-          </a:bodyPr>
-          <a:lstStyle/>
-          <a:p>
-            <a:pPr algn="ctr">
-              <a:lnSpc>
-                <a:spcPts val="1232"/>
-              </a:lnSpc>
-            </a:pPr>
-            <a:r>
-              <a:rPr sz="850" b="1" spc="200">
-                <a:solidFill>
-                  <a:srgbClr val="FFFFFF"/>
-                </a:solidFill>
-                <a:latin typeface="맑은 고딕"/>
-                <a:ea typeface="맑은 고딕"/>
-              </a:rPr>
-              <a:t>기관명 · 부서명</a:t>
-            </a:r>
-          </a:p>
-        </p:txBody>
-      </p:sp>
-      <p:sp>
-        <p:nvSpPr>
-          <p:cNvPr id="5" name="Rectangle 4"/>
+              <a:t>담당 업무</a:t>
+            </a:r>
+          </a:p>
+        </p:txBody>
+      </p:sp>
+      <p:sp>
+        <p:nvSpPr>
+          <p:cNvPr id="3" name="Rectangle 2"/>
           <p:cNvSpPr/>
           <p:nvPr/>
         </p:nvSpPr>
         <p:spPr>
           <a:xfrm>
-            <a:off x="1530000" y="1051200"/>
-            <a:ext cx="180000" cy="14400"/>
+            <a:off x="252000" y="367200"/>
+            <a:ext cx="108000" cy="14400"/>
           </a:xfrm>
           <a:prstGeom prst="rect">
             <a:avLst/>
@@ -3736,14 +3667,45 @@
       </p:sp>
       <p:sp>
         <p:nvSpPr>
-          <p:cNvPr id="6" name="텍스트"/>
+          <p:cNvPr id="4" name="Rounded Rectangle 3"/>
+          <p:cNvSpPr/>
+          <p:nvPr/>
+        </p:nvSpPr>
+        <p:spPr>
+          <a:xfrm>
+            <a:off x="252000" y="540000"/>
+            <a:ext cx="666200" cy="194361"/>
+          </a:xfrm>
+          <a:prstGeom prst="roundRect">
+            <a:avLst>
+              <a:gd name="adj" fmla="val 50000"/>
+            </a:avLst>
+          </a:prstGeom>
+          <a:noFill/>
+          <a:ln w="3600">
+            <a:solidFill>
+              <a:srgbClr val="DBDBFF"/>
+            </a:solidFill>
+          </a:ln>
+        </p:spPr>
+        <p:txBody>
+          <a:bodyPr rtlCol="0" anchor="ctr"/>
+          <a:lstStyle/>
+          <a:p>
+            <a:pPr algn="ctr"/>
+          </a:p>
+        </p:txBody>
+      </p:sp>
+      <p:sp>
+        <p:nvSpPr>
+          <p:cNvPr id="5" name="텍스트"/>
           <p:cNvSpPr txBox="1"/>
           <p:nvPr/>
         </p:nvSpPr>
         <p:spPr>
           <a:xfrm>
-            <a:off x="540000" y="1188000"/>
-            <a:ext cx="2160000" cy="360000"/>
+            <a:off x="252000" y="540000"/>
+            <a:ext cx="666200" cy="194361"/>
           </a:xfrm>
           <a:prstGeom prst="rect">
             <a:avLst/>
@@ -3751,25 +3713,459 @@
           <a:noFill/>
         </p:spPr>
         <p:txBody>
+          <a:bodyPr wrap="square" lIns="0" rIns="0" tIns="0" bIns="0" anchor="ctr">
+            <a:spAutoFit/>
+          </a:bodyPr>
+          <a:lstStyle/>
+          <a:p>
+            <a:pPr algn="ctr">
+              <a:lnSpc>
+                <a:spcPts val="986"/>
+              </a:lnSpc>
+            </a:pPr>
+            <a:r>
+              <a:rPr sz="680" b="0">
+                <a:solidFill>
+                  <a:srgbClr val="FFFFFF"/>
+                </a:solidFill>
+                <a:latin typeface="맑은 고딕"/>
+                <a:ea typeface="맑은 고딕"/>
+              </a:rPr>
+              <a:t>주민 서비스</a:t>
+            </a:r>
+          </a:p>
+        </p:txBody>
+      </p:sp>
+      <p:sp>
+        <p:nvSpPr>
+          <p:cNvPr id="6" name="Rounded Rectangle 5"/>
+          <p:cNvSpPr/>
+          <p:nvPr/>
+        </p:nvSpPr>
+        <p:spPr>
+          <a:xfrm>
+            <a:off x="968600" y="540000"/>
+            <a:ext cx="750833" cy="194361"/>
+          </a:xfrm>
+          <a:prstGeom prst="roundRect">
+            <a:avLst>
+              <a:gd name="adj" fmla="val 50000"/>
+            </a:avLst>
+          </a:prstGeom>
+          <a:noFill/>
+          <a:ln w="3600">
+            <a:solidFill>
+              <a:srgbClr val="DBDBFF"/>
+            </a:solidFill>
+          </a:ln>
+        </p:spPr>
+        <p:txBody>
+          <a:bodyPr rtlCol="0" anchor="ctr"/>
+          <a:lstStyle/>
+          <a:p>
+            <a:pPr algn="ctr"/>
+          </a:p>
+        </p:txBody>
+      </p:sp>
+      <p:sp>
+        <p:nvSpPr>
+          <p:cNvPr id="7" name="텍스트"/>
+          <p:cNvSpPr txBox="1"/>
+          <p:nvPr/>
+        </p:nvSpPr>
+        <p:spPr>
+          <a:xfrm>
+            <a:off x="968600" y="540000"/>
+            <a:ext cx="750833" cy="194361"/>
+          </a:xfrm>
+          <a:prstGeom prst="rect">
+            <a:avLst/>
+          </a:prstGeom>
+          <a:noFill/>
+        </p:spPr>
+        <p:txBody>
+          <a:bodyPr wrap="square" lIns="0" rIns="0" tIns="0" bIns="0" anchor="ctr">
+            <a:spAutoFit/>
+          </a:bodyPr>
+          <a:lstStyle/>
+          <a:p>
+            <a:pPr algn="ctr">
+              <a:lnSpc>
+                <a:spcPts val="986"/>
+              </a:lnSpc>
+            </a:pPr>
+            <a:r>
+              <a:rPr sz="680" b="0">
+                <a:solidFill>
+                  <a:srgbClr val="FFFFFF"/>
+                </a:solidFill>
+                <a:latin typeface="맑은 고딕"/>
+                <a:ea typeface="맑은 고딕"/>
+              </a:rPr>
+              <a:t>문화 · 체육</a:t>
+            </a:r>
+          </a:p>
+        </p:txBody>
+      </p:sp>
+      <p:sp>
+        <p:nvSpPr>
+          <p:cNvPr id="8" name="Rounded Rectangle 7"/>
+          <p:cNvSpPr/>
+          <p:nvPr/>
+        </p:nvSpPr>
+        <p:spPr>
+          <a:xfrm>
+            <a:off x="1769833" y="540000"/>
+            <a:ext cx="581567" cy="194361"/>
+          </a:xfrm>
+          <a:prstGeom prst="roundRect">
+            <a:avLst>
+              <a:gd name="adj" fmla="val 50000"/>
+            </a:avLst>
+          </a:prstGeom>
+          <a:noFill/>
+          <a:ln w="3600">
+            <a:solidFill>
+              <a:srgbClr val="DBDBFF"/>
+            </a:solidFill>
+          </a:ln>
+        </p:spPr>
+        <p:txBody>
+          <a:bodyPr rtlCol="0" anchor="ctr"/>
+          <a:lstStyle/>
+          <a:p>
+            <a:pPr algn="ctr"/>
+          </a:p>
+        </p:txBody>
+      </p:sp>
+      <p:sp>
+        <p:nvSpPr>
+          <p:cNvPr id="9" name="텍스트"/>
+          <p:cNvSpPr txBox="1"/>
+          <p:nvPr/>
+        </p:nvSpPr>
+        <p:spPr>
+          <a:xfrm>
+            <a:off x="1769833" y="540000"/>
+            <a:ext cx="581567" cy="194361"/>
+          </a:xfrm>
+          <a:prstGeom prst="rect">
+            <a:avLst/>
+          </a:prstGeom>
+          <a:noFill/>
+        </p:spPr>
+        <p:txBody>
+          <a:bodyPr wrap="square" lIns="0" rIns="0" tIns="0" bIns="0" anchor="ctr">
+            <a:spAutoFit/>
+          </a:bodyPr>
+          <a:lstStyle/>
+          <a:p>
+            <a:pPr algn="ctr">
+              <a:lnSpc>
+                <a:spcPts val="986"/>
+              </a:lnSpc>
+            </a:pPr>
+            <a:r>
+              <a:rPr sz="680" b="0">
+                <a:solidFill>
+                  <a:srgbClr val="FFFFFF"/>
+                </a:solidFill>
+                <a:latin typeface="맑은 고딕"/>
+                <a:ea typeface="맑은 고딕"/>
+              </a:rPr>
+              <a:t>환경 관리</a:t>
+            </a:r>
+          </a:p>
+        </p:txBody>
+      </p:sp>
+      <p:sp>
+        <p:nvSpPr>
+          <p:cNvPr id="10" name="Rounded Rectangle 9"/>
+          <p:cNvSpPr/>
+          <p:nvPr/>
+        </p:nvSpPr>
+        <p:spPr>
+          <a:xfrm>
+            <a:off x="2401800" y="540000"/>
+            <a:ext cx="581567" cy="194361"/>
+          </a:xfrm>
+          <a:prstGeom prst="roundRect">
+            <a:avLst>
+              <a:gd name="adj" fmla="val 50000"/>
+            </a:avLst>
+          </a:prstGeom>
+          <a:noFill/>
+          <a:ln w="3600">
+            <a:solidFill>
+              <a:srgbClr val="DBDBFF"/>
+            </a:solidFill>
+          </a:ln>
+        </p:spPr>
+        <p:txBody>
+          <a:bodyPr rtlCol="0" anchor="ctr"/>
+          <a:lstStyle/>
+          <a:p>
+            <a:pPr algn="ctr"/>
+          </a:p>
+        </p:txBody>
+      </p:sp>
+      <p:sp>
+        <p:nvSpPr>
+          <p:cNvPr id="11" name="텍스트"/>
+          <p:cNvSpPr txBox="1"/>
+          <p:nvPr/>
+        </p:nvSpPr>
+        <p:spPr>
+          <a:xfrm>
+            <a:off x="2401800" y="540000"/>
+            <a:ext cx="581567" cy="194361"/>
+          </a:xfrm>
+          <a:prstGeom prst="rect">
+            <a:avLst/>
+          </a:prstGeom>
+          <a:noFill/>
+        </p:spPr>
+        <p:txBody>
+          <a:bodyPr wrap="square" lIns="0" rIns="0" tIns="0" bIns="0" anchor="ctr">
+            <a:spAutoFit/>
+          </a:bodyPr>
+          <a:lstStyle/>
+          <a:p>
+            <a:pPr algn="ctr">
+              <a:lnSpc>
+                <a:spcPts val="986"/>
+              </a:lnSpc>
+            </a:pPr>
+            <a:r>
+              <a:rPr sz="680" b="0">
+                <a:solidFill>
+                  <a:srgbClr val="FFFFFF"/>
+                </a:solidFill>
+                <a:latin typeface="맑은 고딕"/>
+                <a:ea typeface="맑은 고딕"/>
+              </a:rPr>
+              <a:t>노인 복지</a:t>
+            </a:r>
+          </a:p>
+        </p:txBody>
+      </p:sp>
+      <p:cxnSp>
+        <p:nvCxnSpPr>
+          <p:cNvPr id="12" name="Connector 11"/>
+          <p:cNvCxnSpPr/>
+          <p:nvPr/>
+        </p:nvCxnSpPr>
+        <p:spPr>
+          <a:xfrm>
+            <a:off x="252000" y="1339200"/>
+            <a:ext cx="2736000" cy="0"/>
+          </a:xfrm>
+          <a:prstGeom prst="line">
+            <a:avLst/>
+          </a:prstGeom>
+          <a:ln w="3600">
+            <a:solidFill>
+              <a:srgbClr val="9D9DFF"/>
+            </a:solidFill>
+          </a:ln>
+        </p:spPr>
+      </p:cxnSp>
+      <p:sp>
+        <p:nvSpPr>
+          <p:cNvPr id="13" name="텍스트"/>
+          <p:cNvSpPr txBox="1"/>
+          <p:nvPr/>
+        </p:nvSpPr>
+        <p:spPr>
+          <a:xfrm>
+            <a:off x="252000" y="1422000"/>
+            <a:ext cx="396000" cy="91441"/>
+          </a:xfrm>
+          <a:prstGeom prst="rect">
+            <a:avLst/>
+          </a:prstGeom>
+          <a:noFill/>
+        </p:spPr>
+        <p:txBody>
           <a:bodyPr wrap="square" lIns="0" rIns="0" tIns="0" bIns="0" anchor="t">
             <a:spAutoFit/>
           </a:bodyPr>
           <a:lstStyle/>
           <a:p>
-            <a:pPr algn="ctr">
+            <a:pPr algn="l">
               <a:lnSpc>
-                <a:spcPts val="1305"/>
+                <a:spcPts val="696"/>
               </a:lnSpc>
             </a:pPr>
             <a:r>
-              <a:rPr sz="900" b="1">
+              <a:rPr sz="480" b="1" spc="140">
                 <a:solidFill>
                   <a:srgbClr val="DBDBFF"/>
                 </a:solidFill>
                 <a:latin typeface="맑은 고딕"/>
                 <a:ea typeface="맑은 고딕"/>
               </a:rPr>
-              <a:t>변화하는 행정을 배웁니다</a:t>
+              <a:t>HOURS</a:t>
+            </a:r>
+          </a:p>
+        </p:txBody>
+      </p:sp>
+      <p:sp>
+        <p:nvSpPr>
+          <p:cNvPr id="14" name="텍스트"/>
+          <p:cNvSpPr txBox="1"/>
+          <p:nvPr/>
+        </p:nvSpPr>
+        <p:spPr>
+          <a:xfrm>
+            <a:off x="648000" y="1411200"/>
+            <a:ext cx="2340000" cy="121921"/>
+          </a:xfrm>
+          <a:prstGeom prst="rect">
+            <a:avLst/>
+          </a:prstGeom>
+          <a:noFill/>
+        </p:spPr>
+        <p:txBody>
+          <a:bodyPr wrap="square" lIns="0" rIns="0" tIns="0" bIns="0" anchor="t">
+            <a:spAutoFit/>
+          </a:bodyPr>
+          <a:lstStyle/>
+          <a:p>
+            <a:pPr algn="l">
+              <a:lnSpc>
+                <a:spcPts val="927"/>
+              </a:lnSpc>
+            </a:pPr>
+            <a:r>
+              <a:rPr sz="640" b="0">
+                <a:solidFill>
+                  <a:srgbClr val="FFFFFF"/>
+                </a:solidFill>
+                <a:latin typeface="맑은 고딕"/>
+                <a:ea typeface="맑은 고딕"/>
+              </a:rPr>
+              <a:t>평일 09:00 – 18:00</a:t>
+            </a:r>
+          </a:p>
+        </p:txBody>
+      </p:sp>
+      <p:sp>
+        <p:nvSpPr>
+          <p:cNvPr id="15" name="텍스트"/>
+          <p:cNvSpPr txBox="1"/>
+          <p:nvPr/>
+        </p:nvSpPr>
+        <p:spPr>
+          <a:xfrm>
+            <a:off x="252000" y="1580400"/>
+            <a:ext cx="396000" cy="91441"/>
+          </a:xfrm>
+          <a:prstGeom prst="rect">
+            <a:avLst/>
+          </a:prstGeom>
+          <a:noFill/>
+        </p:spPr>
+        <p:txBody>
+          <a:bodyPr wrap="square" lIns="0" rIns="0" tIns="0" bIns="0" anchor="t">
+            <a:spAutoFit/>
+          </a:bodyPr>
+          <a:lstStyle/>
+          <a:p>
+            <a:pPr algn="l">
+              <a:lnSpc>
+                <a:spcPts val="696"/>
+              </a:lnSpc>
+            </a:pPr>
+            <a:r>
+              <a:rPr sz="480" b="1" spc="140">
+                <a:solidFill>
+                  <a:srgbClr val="DBDBFF"/>
+                </a:solidFill>
+                <a:latin typeface="맑은 고딕"/>
+                <a:ea typeface="맑은 고딕"/>
+              </a:rPr>
+              <a:t>KAKAO</a:t>
+            </a:r>
+          </a:p>
+        </p:txBody>
+      </p:sp>
+      <p:sp>
+        <p:nvSpPr>
+          <p:cNvPr id="16" name="텍스트"/>
+          <p:cNvSpPr txBox="1"/>
+          <p:nvPr/>
+        </p:nvSpPr>
+        <p:spPr>
+          <a:xfrm>
+            <a:off x="648000" y="1569600"/>
+            <a:ext cx="2340000" cy="121921"/>
+          </a:xfrm>
+          <a:prstGeom prst="rect">
+            <a:avLst/>
+          </a:prstGeom>
+          <a:noFill/>
+        </p:spPr>
+        <p:txBody>
+          <a:bodyPr wrap="square" lIns="0" rIns="0" tIns="0" bIns="0" anchor="t">
+            <a:spAutoFit/>
+          </a:bodyPr>
+          <a:lstStyle/>
+          <a:p>
+            <a:pPr algn="l">
+              <a:lnSpc>
+                <a:spcPts val="927"/>
+              </a:lnSpc>
+            </a:pPr>
+            <a:r>
+              <a:rPr sz="640" b="0">
+                <a:solidFill>
+                  <a:srgbClr val="FFFFFF"/>
+                </a:solidFill>
+                <a:latin typeface="맑은 고딕"/>
+                <a:ea typeface="맑은 고딕"/>
+              </a:rPr>
+              <a:t>@채널아이디</a:t>
+            </a:r>
+          </a:p>
+        </p:txBody>
+      </p:sp>
+      <p:sp>
+        <p:nvSpPr>
+          <p:cNvPr id="17" name="텍스트"/>
+          <p:cNvSpPr txBox="1"/>
+          <p:nvPr/>
+        </p:nvSpPr>
+        <p:spPr>
+          <a:xfrm>
+            <a:off x="1548000" y="1411200"/>
+            <a:ext cx="1440000" cy="123826"/>
+          </a:xfrm>
+          <a:prstGeom prst="rect">
+            <a:avLst/>
+          </a:prstGeom>
+          <a:noFill/>
+        </p:spPr>
+        <p:txBody>
+          <a:bodyPr wrap="square" lIns="0" rIns="0" tIns="0" bIns="0" anchor="t">
+            <a:spAutoFit/>
+          </a:bodyPr>
+          <a:lstStyle/>
+          <a:p>
+            <a:pPr algn="r">
+              <a:lnSpc>
+                <a:spcPts val="942"/>
+              </a:lnSpc>
+            </a:pPr>
+            <a:r>
+              <a:rPr sz="650" b="1" spc="220">
+                <a:solidFill>
+                  <a:srgbClr val="DBDBFF"/>
+                </a:solidFill>
+                <a:latin typeface="맑은 고딕"/>
+                <a:ea typeface="맑은 고딕"/>
+              </a:rPr>
+              <a:t>기관명 · 부서명</a:t>
             </a:r>
           </a:p>
         </p:txBody>
